--- a/reports/2026-08.pptx
+++ b/reports/2026-08.pptx
@@ -5236,7 +5236,7 @@
                 <a:ea typeface="Calibri" pitchFamily="34" charset="-122"/>
                 <a:cs typeface="Calibri" pitchFamily="34" charset="-120"/>
               </a:rPr>
-              <a:t>Prepared: September 9, 2026</a:t>
+              <a:t>Prepared: October 6, 2026</a:t>
             </a:r>
             <a:endParaRPr lang="en-US" sz="1200" dirty="0"/>
           </a:p>
